--- a/lecNote/11_1stProject/0708_sample_v1.pptx
+++ b/lecNote/11_1stProject/0708_sample_v1.pptx
@@ -242,7 +242,7 @@
           <a:p>
             <a:fld id="{684ABEAC-FD1E-446D-854E-09142DFB339C}" type="datetimeFigureOut">
               <a:rPr lang="ko-KR" altLang="en-US" smtClean="0"/>
-              <a:t>2025-07-07</a:t>
+              <a:t>2025-07-08</a:t>
             </a:fld>
             <a:endParaRPr lang="ko-KR" altLang="en-US"/>
           </a:p>
@@ -407,7 +407,7 @@
           <a:p>
             <a:fld id="{E299D967-67B2-4132-B52D-A253871A1F24}" type="datetimeFigureOut">
               <a:rPr lang="ko-KR" altLang="en-US" smtClean="0"/>
-              <a:t>2025-07-07</a:t>
+              <a:t>2025-07-08</a:t>
             </a:fld>
             <a:endParaRPr lang="ko-KR" altLang="en-US"/>
           </a:p>
@@ -1249,7 +1249,7 @@
           <a:p>
             <a:fld id="{20303F18-CB98-4E85-A37B-EF5A4E6C8DE7}" type="datetime1">
               <a:rPr lang="ko-KR" altLang="en-US" smtClean="0"/>
-              <a:t>2025-07-07</a:t>
+              <a:t>2025-07-08</a:t>
             </a:fld>
             <a:endParaRPr lang="ko-KR" altLang="en-US"/>
           </a:p>
@@ -1422,7 +1422,7 @@
           <a:p>
             <a:fld id="{CCA16C65-58A5-46D5-A762-12670B92641B}" type="datetime1">
               <a:rPr lang="ko-KR" altLang="en-US" smtClean="0"/>
-              <a:t>2025-07-07</a:t>
+              <a:t>2025-07-08</a:t>
             </a:fld>
             <a:endParaRPr lang="ko-KR" altLang="en-US"/>
           </a:p>
@@ -1600,7 +1600,7 @@
           <a:p>
             <a:fld id="{2D09A68A-AC6E-41FE-B28C-2BB812CC2E01}" type="datetime1">
               <a:rPr lang="ko-KR" altLang="en-US" smtClean="0"/>
-              <a:t>2025-07-07</a:t>
+              <a:t>2025-07-08</a:t>
             </a:fld>
             <a:endParaRPr lang="ko-KR" altLang="en-US"/>
           </a:p>
@@ -1768,7 +1768,7 @@
           <a:p>
             <a:fld id="{690B8B09-A0F3-4880-B090-7FDDEE5B5065}" type="datetime1">
               <a:rPr lang="ko-KR" altLang="en-US" smtClean="0"/>
-              <a:t>2025-07-07</a:t>
+              <a:t>2025-07-08</a:t>
             </a:fld>
             <a:endParaRPr lang="ko-KR" altLang="en-US"/>
           </a:p>
@@ -2013,7 +2013,7 @@
           <a:p>
             <a:fld id="{82F7D3F4-816B-4FA6-91FC-91836ECD0E53}" type="datetime1">
               <a:rPr lang="ko-KR" altLang="en-US" smtClean="0"/>
-              <a:t>2025-07-07</a:t>
+              <a:t>2025-07-08</a:t>
             </a:fld>
             <a:endParaRPr lang="ko-KR" altLang="en-US"/>
           </a:p>
@@ -2298,7 +2298,7 @@
           <a:p>
             <a:fld id="{2FB9FCFF-984A-4549-AB53-391F9EC1244A}" type="datetime1">
               <a:rPr lang="ko-KR" altLang="en-US" smtClean="0"/>
-              <a:t>2025-07-07</a:t>
+              <a:t>2025-07-08</a:t>
             </a:fld>
             <a:endParaRPr lang="ko-KR" altLang="en-US"/>
           </a:p>
@@ -2717,7 +2717,7 @@
           <a:p>
             <a:fld id="{94618DE4-C4FE-4171-90C7-38CF01638033}" type="datetime1">
               <a:rPr lang="ko-KR" altLang="en-US" smtClean="0"/>
-              <a:t>2025-07-07</a:t>
+              <a:t>2025-07-08</a:t>
             </a:fld>
             <a:endParaRPr lang="ko-KR" altLang="en-US"/>
           </a:p>
@@ -2834,7 +2834,7 @@
           <a:p>
             <a:fld id="{33587621-9D18-4C20-9B84-3E938621A025}" type="datetime1">
               <a:rPr lang="ko-KR" altLang="en-US" smtClean="0"/>
-              <a:t>2025-07-07</a:t>
+              <a:t>2025-07-08</a:t>
             </a:fld>
             <a:endParaRPr lang="ko-KR" altLang="en-US"/>
           </a:p>
@@ -3279,7 +3279,7 @@
           <a:p>
             <a:fld id="{B517649B-2577-404C-858E-51E9DEBB2548}" type="datetime1">
               <a:rPr lang="ko-KR" altLang="en-US" smtClean="0"/>
-              <a:t>2025-07-07</a:t>
+              <a:t>2025-07-08</a:t>
             </a:fld>
             <a:endParaRPr lang="ko-KR" altLang="en-US"/>
           </a:p>
@@ -3531,7 +3531,7 @@
           <a:p>
             <a:fld id="{8D84C674-EF46-4F27-9E3E-4F6A170B0DC6}" type="datetime1">
               <a:rPr lang="ko-KR" altLang="en-US" smtClean="0"/>
-              <a:t>2025-07-07</a:t>
+              <a:t>2025-07-08</a:t>
             </a:fld>
             <a:endParaRPr lang="ko-KR" altLang="en-US"/>
           </a:p>
@@ -3742,7 +3742,7 @@
           <a:p>
             <a:fld id="{B40F11ED-9D7B-4CCE-A57D-CC1D7760FB25}" type="datetime1">
               <a:rPr lang="ko-KR" altLang="en-US" smtClean="0"/>
-              <a:t>2025-07-07</a:t>
+              <a:t>2025-07-08</a:t>
             </a:fld>
             <a:endParaRPr lang="ko-KR" altLang="en-US"/>
           </a:p>
@@ -4612,7 +4612,7 @@
           <a:lstStyle/>
           <a:p>
             <a:r>
-              <a:rPr lang="ko-KR" altLang="en-US" sz="1350" b="1" smtClean="0">
+              <a:rPr lang="ko-KR" altLang="en-US" sz="1350" b="1">
                 <a:solidFill>
                   <a:srgbClr val="756B5F"/>
                 </a:solidFill>
@@ -4677,7 +4677,7 @@
           <a:p>
             <a:pPr algn="ctr"/>
             <a:r>
-              <a:rPr lang="ko-KR" altLang="en-US" sz="750" b="1" smtClean="0"/>
+              <a:rPr lang="ko-KR" altLang="en-US" sz="750" b="1"/>
               <a:t>프로젝트명</a:t>
             </a:r>
             <a:endParaRPr lang="ko-KR" altLang="en-US" sz="750" b="1" dirty="0"/>
@@ -6057,7 +6057,7 @@
           <a:p>
             <a:pPr algn="ctr"/>
             <a:r>
-              <a:rPr lang="ko-KR" altLang="en-US" sz="1100" b="1" dirty="0" smtClean="0"/>
+              <a:rPr lang="ko-KR" altLang="en-US" sz="1100" b="1" dirty="0"/>
               <a:t>방문이용자</a:t>
             </a:r>
           </a:p>
@@ -6113,18 +6113,18 @@
           <a:p>
             <a:pPr algn="ctr"/>
             <a:r>
-              <a:rPr lang="ko-KR" altLang="en-US" sz="1000" b="1" smtClean="0"/>
+              <a:rPr lang="ko-KR" altLang="en-US" sz="1000" b="1"/>
               <a:t>기능</a:t>
             </a:r>
             <a:r>
-              <a:rPr lang="en-US" altLang="ko-KR" sz="1000" b="1" smtClean="0"/>
+              <a:rPr lang="en-US" altLang="ko-KR" sz="1000" b="1"/>
               <a:t>1</a:t>
             </a:r>
             <a:r>
-              <a:rPr lang="ko-KR" altLang="en-US" sz="1000" b="1" smtClean="0"/>
+              <a:rPr lang="ko-KR" altLang="en-US" sz="1000" b="1"/>
               <a:t> </a:t>
             </a:r>
-            <a:endParaRPr lang="ko-KR" altLang="en-US" sz="1000" b="1" dirty="0" smtClean="0"/>
+            <a:endParaRPr lang="ko-KR" altLang="en-US" sz="1000" b="1" dirty="0"/>
           </a:p>
         </p:txBody>
       </p:sp>
@@ -6178,14 +6178,14 @@
           <a:p>
             <a:pPr algn="ctr"/>
             <a:r>
-              <a:rPr lang="ko-KR" altLang="en-US" sz="1000" b="1" smtClean="0"/>
+              <a:rPr lang="ko-KR" altLang="en-US" sz="1000" b="1"/>
               <a:t>기능</a:t>
             </a:r>
             <a:r>
-              <a:rPr lang="en-US" altLang="ko-KR" sz="1000" b="1" smtClean="0"/>
+              <a:rPr lang="en-US" altLang="ko-KR" sz="1000" b="1"/>
               <a:t>2</a:t>
             </a:r>
-            <a:endParaRPr lang="ko-KR" altLang="en-US" sz="1000" b="1" dirty="0" smtClean="0"/>
+            <a:endParaRPr lang="ko-KR" altLang="en-US" sz="1000" b="1" dirty="0"/>
           </a:p>
         </p:txBody>
       </p:sp>
@@ -6239,14 +6239,14 @@
           <a:p>
             <a:pPr algn="ctr"/>
             <a:r>
-              <a:rPr lang="ko-KR" altLang="en-US" sz="1000" b="1" smtClean="0"/>
+              <a:rPr lang="ko-KR" altLang="en-US" sz="1000" b="1"/>
               <a:t>기능</a:t>
             </a:r>
             <a:r>
-              <a:rPr lang="en-US" altLang="ko-KR" sz="1000" b="1" smtClean="0"/>
+              <a:rPr lang="en-US" altLang="ko-KR" sz="1000" b="1"/>
               <a:t>3</a:t>
             </a:r>
-            <a:endParaRPr lang="ko-KR" altLang="en-US" sz="1000" b="1" dirty="0" smtClean="0"/>
+            <a:endParaRPr lang="ko-KR" altLang="en-US" sz="1000" b="1" dirty="0"/>
           </a:p>
         </p:txBody>
       </p:sp>
@@ -6300,14 +6300,14 @@
           <a:p>
             <a:pPr algn="ctr"/>
             <a:r>
-              <a:rPr lang="ko-KR" altLang="en-US" sz="1000" b="1" smtClean="0"/>
+              <a:rPr lang="ko-KR" altLang="en-US" sz="1000" b="1"/>
               <a:t>기능</a:t>
             </a:r>
             <a:r>
-              <a:rPr lang="en-US" altLang="ko-KR" sz="1000" b="1" smtClean="0"/>
+              <a:rPr lang="en-US" altLang="ko-KR" sz="1000" b="1"/>
               <a:t>4</a:t>
             </a:r>
-            <a:endParaRPr lang="ko-KR" altLang="en-US" sz="1000" b="1" dirty="0" smtClean="0"/>
+            <a:endParaRPr lang="ko-KR" altLang="en-US" sz="1000" b="1" dirty="0"/>
           </a:p>
         </p:txBody>
       </p:sp>
@@ -6552,7 +6552,7 @@
           <a:lstStyle/>
           <a:p>
             <a:pPr algn="ctr"/>
-            <a:endParaRPr lang="ko-KR" altLang="en-US" sz="1000" b="1" dirty="0" smtClean="0"/>
+            <a:endParaRPr lang="ko-KR" altLang="en-US" sz="1000" b="1" dirty="0"/>
           </a:p>
         </p:txBody>
       </p:sp>
@@ -6641,7 +6641,7 @@
           <a:lstStyle/>
           <a:p>
             <a:pPr algn="ctr"/>
-            <a:endParaRPr lang="ko-KR" altLang="en-US" sz="1000" b="1" dirty="0" smtClean="0"/>
+            <a:endParaRPr lang="ko-KR" altLang="en-US" sz="1000" b="1" dirty="0"/>
           </a:p>
         </p:txBody>
       </p:sp>
@@ -6668,14 +6668,13 @@
           <a:lstStyle/>
           <a:p>
             <a:r>
-              <a:rPr lang="en-US" altLang="ko-KR" sz="1000" dirty="0" smtClean="0"/>
+              <a:rPr lang="en-US" altLang="ko-KR" sz="1000" dirty="0"/>
               <a:t>1. </a:t>
             </a:r>
             <a:r>
-              <a:rPr lang="ko-KR" altLang="en-US" sz="1000" dirty="0" smtClean="0"/>
+              <a:rPr lang="ko-KR" altLang="en-US" sz="1000" dirty="0"/>
               <a:t>회원정보입력</a:t>
             </a:r>
-            <a:endParaRPr lang="ko-KR" altLang="en-US" sz="1000" dirty="0"/>
           </a:p>
         </p:txBody>
       </p:sp>
@@ -6738,14 +6737,13 @@
           <a:lstStyle/>
           <a:p>
             <a:r>
-              <a:rPr lang="en-US" altLang="ko-KR" sz="1000" dirty="0" smtClean="0"/>
+              <a:rPr lang="en-US" altLang="ko-KR" sz="1000" dirty="0"/>
               <a:t>2. </a:t>
             </a:r>
             <a:r>
-              <a:rPr lang="ko-KR" altLang="en-US" sz="1000" dirty="0" smtClean="0"/>
+              <a:rPr lang="ko-KR" altLang="en-US" sz="1000" dirty="0"/>
               <a:t>회원정보확인</a:t>
             </a:r>
-            <a:endParaRPr lang="ko-KR" altLang="en-US" sz="1000" dirty="0"/>
           </a:p>
         </p:txBody>
       </p:sp>
@@ -6798,7 +6796,7 @@
           <a:lstStyle/>
           <a:p>
             <a:pPr algn="ctr"/>
-            <a:endParaRPr lang="ko-KR" altLang="en-US" sz="1000" b="1" dirty="0" smtClean="0"/>
+            <a:endParaRPr lang="ko-KR" altLang="en-US" sz="1000" b="1" dirty="0"/>
           </a:p>
         </p:txBody>
       </p:sp>
@@ -6888,7 +6886,7 @@
           <a:lstStyle/>
           <a:p>
             <a:pPr algn="ctr"/>
-            <a:endParaRPr lang="ko-KR" altLang="en-US" sz="1000" b="1" dirty="0" smtClean="0"/>
+            <a:endParaRPr lang="ko-KR" altLang="en-US" sz="1000" b="1" dirty="0"/>
           </a:p>
         </p:txBody>
       </p:sp>
@@ -6915,14 +6913,13 @@
           <a:lstStyle/>
           <a:p>
             <a:r>
-              <a:rPr lang="en-US" altLang="ko-KR" sz="1000" dirty="0" smtClean="0"/>
+              <a:rPr lang="en-US" altLang="ko-KR" sz="1000" dirty="0"/>
               <a:t>3. </a:t>
             </a:r>
             <a:r>
-              <a:rPr lang="ko-KR" altLang="en-US" sz="1000" dirty="0" smtClean="0"/>
+              <a:rPr lang="ko-KR" altLang="en-US" sz="1000" dirty="0"/>
               <a:t>로그인</a:t>
             </a:r>
-            <a:endParaRPr lang="ko-KR" altLang="en-US" sz="1000" dirty="0"/>
           </a:p>
         </p:txBody>
       </p:sp>
@@ -6950,17 +6947,12 @@
           <a:p>
             <a:r>
               <a:rPr lang="en-US" altLang="ko-KR" sz="1000" dirty="0"/>
-              <a:t>4</a:t>
-            </a:r>
-            <a:r>
-              <a:rPr lang="en-US" altLang="ko-KR" sz="1000" dirty="0" smtClean="0"/>
-              <a:t>. </a:t>
-            </a:r>
-            <a:r>
-              <a:rPr lang="ko-KR" altLang="en-US" sz="1000" dirty="0" smtClean="0"/>
+              <a:t>4. </a:t>
+            </a:r>
+            <a:r>
+              <a:rPr lang="ko-KR" altLang="en-US" sz="1000" dirty="0"/>
               <a:t>회원정보확인승인</a:t>
             </a:r>
-            <a:endParaRPr lang="ko-KR" altLang="en-US" sz="1000" dirty="0"/>
           </a:p>
         </p:txBody>
       </p:sp>
@@ -7049,7 +7041,7 @@
           <a:lstStyle/>
           <a:p>
             <a:pPr algn="ctr"/>
-            <a:endParaRPr lang="ko-KR" altLang="en-US" sz="1000" b="1" dirty="0" smtClean="0"/>
+            <a:endParaRPr lang="ko-KR" altLang="en-US" sz="1000" b="1" dirty="0"/>
           </a:p>
         </p:txBody>
       </p:sp>
@@ -7139,7 +7131,7 @@
           <a:lstStyle/>
           <a:p>
             <a:pPr algn="ctr"/>
-            <a:endParaRPr lang="ko-KR" altLang="en-US" sz="1000" b="1" dirty="0" smtClean="0"/>
+            <a:endParaRPr lang="ko-KR" altLang="en-US" sz="1000" b="1" dirty="0"/>
           </a:p>
         </p:txBody>
       </p:sp>
@@ -7166,14 +7158,13 @@
           <a:lstStyle/>
           <a:p>
             <a:r>
-              <a:rPr lang="en-US" altLang="ko-KR" sz="1000" dirty="0" smtClean="0"/>
+              <a:rPr lang="en-US" altLang="ko-KR" sz="1000" dirty="0"/>
               <a:t>5. </a:t>
             </a:r>
             <a:r>
-              <a:rPr lang="ko-KR" altLang="en-US" sz="1000" dirty="0" smtClean="0"/>
+              <a:rPr lang="ko-KR" altLang="en-US" sz="1000" dirty="0"/>
               <a:t>도서검색</a:t>
             </a:r>
-            <a:endParaRPr lang="ko-KR" altLang="en-US" sz="1000" dirty="0"/>
           </a:p>
         </p:txBody>
       </p:sp>
@@ -7200,16 +7191,12 @@
           <a:lstStyle/>
           <a:p>
             <a:r>
-              <a:rPr lang="en-US" altLang="ko-KR" sz="1000" dirty="0" smtClean="0"/>
+              <a:rPr lang="en-US" altLang="ko-KR" sz="1000" dirty="0"/>
               <a:t>6. </a:t>
             </a:r>
             <a:r>
-              <a:rPr lang="ko-KR" altLang="en-US" sz="1000" dirty="0" smtClean="0"/>
-              <a:t>도서정보확</a:t>
-            </a:r>
-            <a:r>
               <a:rPr lang="ko-KR" altLang="en-US" sz="1000" dirty="0"/>
-              <a:t>인</a:t>
+              <a:t>도서정보확인</a:t>
             </a:r>
           </a:p>
         </p:txBody>
@@ -7299,7 +7286,7 @@
           <a:lstStyle/>
           <a:p>
             <a:pPr algn="ctr"/>
-            <a:endParaRPr lang="ko-KR" altLang="en-US" sz="1000" b="1" dirty="0" smtClean="0"/>
+            <a:endParaRPr lang="ko-KR" altLang="en-US" sz="1000" b="1" dirty="0"/>
           </a:p>
         </p:txBody>
       </p:sp>
@@ -7389,7 +7376,7 @@
           <a:lstStyle/>
           <a:p>
             <a:pPr algn="ctr"/>
-            <a:endParaRPr lang="ko-KR" altLang="en-US" sz="1000" b="1" dirty="0" smtClean="0"/>
+            <a:endParaRPr lang="ko-KR" altLang="en-US" sz="1000" b="1" dirty="0"/>
           </a:p>
         </p:txBody>
       </p:sp>
@@ -7417,19 +7404,11 @@
           <a:p>
             <a:r>
               <a:rPr lang="en-US" altLang="ko-KR" sz="900" dirty="0"/>
-              <a:t>7</a:t>
-            </a:r>
-            <a:r>
-              <a:rPr lang="en-US" altLang="ko-KR" sz="900" dirty="0" smtClean="0"/>
-              <a:t>. </a:t>
-            </a:r>
-            <a:r>
-              <a:rPr lang="ko-KR" altLang="en-US" sz="900" dirty="0" smtClean="0"/>
-              <a:t>자리예</a:t>
+              <a:t>7. </a:t>
             </a:r>
             <a:r>
               <a:rPr lang="ko-KR" altLang="en-US" sz="900" dirty="0"/>
-              <a:t>약</a:t>
+              <a:t>자리예약</a:t>
             </a:r>
           </a:p>
         </p:txBody>
@@ -7457,22 +7436,13 @@
           <a:lstStyle/>
           <a:p>
             <a:r>
-              <a:rPr lang="en-US" altLang="ko-KR" sz="900" dirty="0" smtClean="0"/>
+              <a:rPr lang="en-US" altLang="ko-KR" sz="900" dirty="0"/>
               <a:t>8. </a:t>
             </a:r>
             <a:r>
-              <a:rPr lang="ko-KR" altLang="en-US" sz="900" dirty="0" smtClean="0"/>
-              <a:t>자리예</a:t>
-            </a:r>
-            <a:r>
               <a:rPr lang="ko-KR" altLang="en-US" sz="900" dirty="0"/>
-              <a:t>약</a:t>
-            </a:r>
-            <a:r>
-              <a:rPr lang="ko-KR" altLang="en-US" sz="900" dirty="0" smtClean="0"/>
-              <a:t>확인</a:t>
-            </a:r>
-            <a:endParaRPr lang="ko-KR" altLang="en-US" sz="900" dirty="0"/>
+              <a:t>자리예약확인</a:t>
+            </a:r>
           </a:p>
         </p:txBody>
       </p:sp>
@@ -7541,14 +7511,13 @@
           <a:lstStyle/>
           <a:p>
             <a:r>
-              <a:rPr lang="en-US" altLang="ko-KR" sz="1000" dirty="0" smtClean="0"/>
+              <a:rPr lang="en-US" altLang="ko-KR" sz="1000" dirty="0"/>
               <a:t>1.1 id</a:t>
             </a:r>
             <a:r>
-              <a:rPr lang="ko-KR" altLang="en-US" sz="1000" dirty="0" smtClean="0"/>
+              <a:rPr lang="ko-KR" altLang="en-US" sz="1000" dirty="0"/>
               <a:t>중복체크</a:t>
             </a:r>
-            <a:endParaRPr lang="ko-KR" altLang="en-US" sz="1000" dirty="0"/>
           </a:p>
         </p:txBody>
       </p:sp>
@@ -7601,7 +7570,7 @@
           <a:lstStyle/>
           <a:p>
             <a:pPr algn="ctr"/>
-            <a:endParaRPr lang="ko-KR" altLang="en-US" sz="1000" b="1" dirty="0" smtClean="0"/>
+            <a:endParaRPr lang="ko-KR" altLang="en-US" sz="1000" b="1" dirty="0"/>
           </a:p>
         </p:txBody>
       </p:sp>
@@ -7682,7 +7651,7 @@
           <a:lstStyle/>
           <a:p>
             <a:r>
-              <a:rPr lang="en-US" altLang="ko-KR" b="1" smtClean="0">
+              <a:rPr lang="en-US" altLang="ko-KR" b="1">
                 <a:solidFill>
                   <a:srgbClr val="756B5F"/>
                 </a:solidFill>
@@ -10781,7 +10750,7 @@
               <a:defRPr/>
             </a:pPr>
             <a:r>
-              <a:rPr lang="ko-KR" altLang="en-US" sz="600" b="1">
+              <a:rPr lang="ko-KR" altLang="en-US" sz="600" b="1" dirty="0">
                 <a:solidFill>
                   <a:schemeClr val="bg1"/>
                 </a:solidFill>
@@ -10789,7 +10758,7 @@
               </a:rPr>
               <a:t>서론</a:t>
             </a:r>
-            <a:endParaRPr lang="en-US" altLang="ko-KR" sz="600" b="1">
+            <a:endParaRPr lang="en-US" altLang="ko-KR" sz="600" b="1" dirty="0">
               <a:solidFill>
                 <a:schemeClr val="bg1"/>
               </a:solidFill>
@@ -10806,74 +10775,59 @@
               <a:defRPr/>
             </a:pPr>
             <a:r>
-              <a:rPr lang="ko-KR" altLang="en-US" sz="600" b="1">
+              <a:rPr lang="ko-KR" altLang="en-US" sz="600" b="1" dirty="0">
                 <a:solidFill>
                   <a:schemeClr val="bg1"/>
                 </a:solidFill>
                 <a:latin typeface="+mn-ea"/>
               </a:rPr>
-              <a:t>주제선정 및 </a:t>
-            </a:r>
-            <a:r>
-              <a:rPr lang="ko-KR" altLang="en-US" sz="600" b="1" smtClean="0">
+              <a:t>주제선정 및 배경</a:t>
+            </a:r>
+            <a:r>
+              <a:rPr lang="en-US" altLang="ko-KR" sz="600" b="1" dirty="0">
                 <a:solidFill>
                   <a:schemeClr val="bg1"/>
                 </a:solidFill>
                 <a:latin typeface="+mn-ea"/>
               </a:rPr>
-              <a:t>배경</a:t>
-            </a:r>
-            <a:r>
-              <a:rPr lang="en-US" altLang="ko-KR" sz="600" b="1" smtClean="0">
+              <a:t>, </a:t>
+            </a:r>
+            <a:r>
+              <a:rPr lang="ko-KR" altLang="en-US" sz="600" b="1" dirty="0">
                 <a:solidFill>
                   <a:schemeClr val="bg1"/>
                 </a:solidFill>
                 <a:latin typeface="+mn-ea"/>
               </a:rPr>
-              <a:t>, </a:t>
-            </a:r>
-            <a:r>
-              <a:rPr lang="ko-KR" altLang="en-US" sz="600" b="1" smtClean="0">
+              <a:t>참조사레</a:t>
+            </a:r>
+            <a:r>
+              <a:rPr lang="en-US" altLang="ko-KR" sz="600" b="1" dirty="0">
                 <a:solidFill>
                   <a:schemeClr val="bg1"/>
                 </a:solidFill>
                 <a:latin typeface="+mn-ea"/>
               </a:rPr>
-              <a:t>참조사레</a:t>
-            </a:r>
-            <a:r>
-              <a:rPr lang="en-US" altLang="ko-KR" sz="600" b="1" smtClean="0">
+              <a:t>(</a:t>
+            </a:r>
+            <a:r>
+              <a:rPr lang="ko-KR" altLang="en-US" sz="600" b="1" dirty="0">
                 <a:solidFill>
                   <a:schemeClr val="bg1"/>
                 </a:solidFill>
                 <a:latin typeface="+mn-ea"/>
               </a:rPr>
-              <a:t>(</a:t>
-            </a:r>
-            <a:r>
-              <a:rPr lang="ko-KR" altLang="en-US" sz="600" b="1" smtClean="0">
+              <a:t>있으면</a:t>
+            </a:r>
+            <a:r>
+              <a:rPr lang="en-US" altLang="ko-KR" sz="600" b="1" dirty="0">
                 <a:solidFill>
                   <a:schemeClr val="bg1"/>
                 </a:solidFill>
                 <a:latin typeface="+mn-ea"/>
               </a:rPr>
-              <a:t>있으면</a:t>
-            </a:r>
-            <a:r>
-              <a:rPr lang="en-US" altLang="ko-KR" sz="600" b="1" smtClean="0">
-                <a:solidFill>
-                  <a:schemeClr val="bg1"/>
-                </a:solidFill>
-                <a:latin typeface="+mn-ea"/>
-              </a:rPr>
               <a:t>)</a:t>
             </a:r>
-            <a:endParaRPr lang="en-US" altLang="ko-KR" sz="600" b="1">
-              <a:solidFill>
-                <a:schemeClr val="bg1"/>
-              </a:solidFill>
-              <a:latin typeface="+mn-ea"/>
-            </a:endParaRPr>
           </a:p>
           <a:p>
             <a:pPr lvl="1">
@@ -10885,7 +10839,7 @@
               <a:defRPr/>
             </a:pPr>
             <a:r>
-              <a:rPr lang="ko-KR" altLang="en-US" sz="600" b="1" smtClean="0">
+              <a:rPr lang="ko-KR" altLang="en-US" sz="600" b="1" dirty="0">
                 <a:solidFill>
                   <a:schemeClr val="bg1"/>
                 </a:solidFill>
@@ -10893,7 +10847,7 @@
               </a:rPr>
               <a:t>목표</a:t>
             </a:r>
-            <a:endParaRPr lang="en-US" altLang="ko-KR" sz="600" b="1" smtClean="0">
+            <a:endParaRPr lang="en-US" altLang="ko-KR" sz="600" b="1" dirty="0">
               <a:solidFill>
                 <a:schemeClr val="bg1"/>
               </a:solidFill>
@@ -10910,15 +10864,15 @@
               <a:defRPr/>
             </a:pPr>
             <a:r>
-              <a:rPr lang="ko-KR" altLang="en-US" sz="600" b="1" smtClean="0">
+              <a:rPr lang="ko-KR" altLang="en-US" sz="600" b="1" dirty="0" err="1">
                 <a:solidFill>
                   <a:schemeClr val="bg1"/>
                 </a:solidFill>
                 <a:latin typeface="+mn-ea"/>
               </a:rPr>
-              <a:t>엄부분장</a:t>
-            </a:r>
-            <a:endParaRPr lang="en-US" altLang="ko-KR" sz="600" b="1" smtClean="0">
+              <a:t>엄무분담</a:t>
+            </a:r>
+            <a:endParaRPr lang="en-US" altLang="ko-KR" sz="600" b="1" dirty="0">
               <a:solidFill>
                 <a:schemeClr val="bg1"/>
               </a:solidFill>
@@ -10935,7 +10889,7 @@
               <a:defRPr/>
             </a:pPr>
             <a:r>
-              <a:rPr lang="ko-KR" altLang="en-US" sz="600" b="1" smtClean="0">
+              <a:rPr lang="ko-KR" altLang="en-US" sz="600" b="1" dirty="0">
                 <a:solidFill>
                   <a:schemeClr val="bg1"/>
                 </a:solidFill>
@@ -10943,7 +10897,7 @@
               </a:rPr>
               <a:t>일정 및 개발환경</a:t>
             </a:r>
-            <a:endParaRPr lang="en-US" altLang="ko-KR" sz="600" b="1" smtClean="0">
+            <a:endParaRPr lang="en-US" altLang="ko-KR" sz="600" b="1" dirty="0">
               <a:solidFill>
                 <a:schemeClr val="bg1"/>
               </a:solidFill>
@@ -10958,7 +10912,7 @@
               <a:defRPr/>
             </a:pPr>
             <a:r>
-              <a:rPr lang="ko-KR" altLang="en-US" sz="1000" b="1" smtClean="0">
+              <a:rPr lang="ko-KR" altLang="en-US" sz="1000" b="1" dirty="0">
                 <a:solidFill>
                   <a:schemeClr val="bg1"/>
                 </a:solidFill>
@@ -10967,7 +10921,7 @@
               <a:t>데이터 </a:t>
             </a:r>
             <a:r>
-              <a:rPr lang="ko-KR" altLang="en-US" sz="1000" b="1">
+              <a:rPr lang="ko-KR" altLang="en-US" sz="1000" b="1" dirty="0" err="1">
                 <a:solidFill>
                   <a:schemeClr val="bg1"/>
                 </a:solidFill>
@@ -10975,7 +10929,7 @@
               </a:rPr>
               <a:t>전처리</a:t>
             </a:r>
-            <a:endParaRPr lang="en-US" altLang="ko-KR" sz="1000" b="1">
+            <a:endParaRPr lang="en-US" altLang="ko-KR" sz="1000" b="1" dirty="0">
               <a:solidFill>
                 <a:schemeClr val="bg1"/>
               </a:solidFill>
@@ -10992,7 +10946,7 @@
               <a:defRPr/>
             </a:pPr>
             <a:r>
-              <a:rPr lang="ko-KR" altLang="en-US" sz="600" b="1">
+              <a:rPr lang="ko-KR" altLang="en-US" sz="600" b="1" dirty="0">
                 <a:solidFill>
                   <a:schemeClr val="bg1"/>
                 </a:solidFill>
@@ -11000,7 +10954,7 @@
               </a:rPr>
               <a:t>개념정의</a:t>
             </a:r>
-            <a:endParaRPr lang="en-US" altLang="ko-KR" sz="600" b="1">
+            <a:endParaRPr lang="en-US" altLang="ko-KR" sz="600" b="1" dirty="0">
               <a:solidFill>
                 <a:schemeClr val="bg1"/>
               </a:solidFill>
@@ -11017,7 +10971,7 @@
               <a:defRPr/>
             </a:pPr>
             <a:r>
-              <a:rPr lang="ko-KR" altLang="en-US" sz="600" b="1">
+              <a:rPr lang="ko-KR" altLang="en-US" sz="600" b="1" dirty="0">
                 <a:solidFill>
                   <a:schemeClr val="bg1"/>
                 </a:solidFill>
@@ -11025,7 +10979,7 @@
               </a:rPr>
               <a:t>활용데이터</a:t>
             </a:r>
-            <a:endParaRPr lang="en-US" altLang="ko-KR" sz="600" b="1">
+            <a:endParaRPr lang="en-US" altLang="ko-KR" sz="600" b="1" dirty="0">
               <a:solidFill>
                 <a:schemeClr val="bg1"/>
               </a:solidFill>
@@ -11042,7 +10996,7 @@
               <a:defRPr/>
             </a:pPr>
             <a:r>
-              <a:rPr lang="ko-KR" altLang="en-US" sz="600" b="1">
+              <a:rPr lang="ko-KR" altLang="en-US" sz="600" b="1" dirty="0">
                 <a:solidFill>
                   <a:schemeClr val="bg1"/>
                 </a:solidFill>
@@ -11050,7 +11004,7 @@
               </a:rPr>
               <a:t>자료 정제 및 병합</a:t>
             </a:r>
-            <a:endParaRPr lang="en-US" altLang="ko-KR" sz="600" b="1">
+            <a:endParaRPr lang="en-US" altLang="ko-KR" sz="600" b="1" dirty="0">
               <a:solidFill>
                 <a:schemeClr val="bg1"/>
               </a:solidFill>
@@ -11067,25 +11021,43 @@
               <a:defRPr/>
             </a:pPr>
             <a:r>
-              <a:rPr lang="ko-KR" altLang="en-US" sz="600" b="1">
+              <a:rPr lang="ko-KR" altLang="en-US" sz="600" b="1" dirty="0">
                 <a:solidFill>
                   <a:schemeClr val="bg1"/>
                 </a:solidFill>
                 <a:latin typeface="+mn-ea"/>
               </a:rPr>
-              <a:t>가중치 산출츨 위한 상관분석 및 그룹화</a:t>
-            </a:r>
-            <a:r>
-              <a:rPr lang="en-US" altLang="ko-KR" sz="600" b="1">
+              <a:t>가중치 </a:t>
+            </a:r>
+            <a:r>
+              <a:rPr lang="ko-KR" altLang="en-US" sz="600" b="1" dirty="0" err="1">
                 <a:solidFill>
                   <a:schemeClr val="bg1"/>
                 </a:solidFill>
                 <a:latin typeface="+mn-ea"/>
               </a:rPr>
+              <a:t>산출츨</a:t>
+            </a:r>
+            <a:r>
+              <a:rPr lang="ko-KR" altLang="en-US" sz="600" b="1" dirty="0">
+                <a:solidFill>
+                  <a:schemeClr val="bg1"/>
+                </a:solidFill>
+                <a:latin typeface="+mn-ea"/>
+              </a:rPr>
+              <a:t> 위한 상관분석 및 그룹화</a:t>
+            </a:r>
+            <a:r>
+              <a:rPr lang="en-US" altLang="ko-KR" sz="600" b="1" dirty="0">
+                <a:solidFill>
+                  <a:schemeClr val="bg1"/>
+                </a:solidFill>
+                <a:latin typeface="+mn-ea"/>
+              </a:rPr>
               <a:t>,</a:t>
             </a:r>
             <a:r>
-              <a:rPr lang="ko-KR" altLang="en-US" sz="600" b="1">
+              <a:rPr lang="ko-KR" altLang="en-US" sz="600" b="1" dirty="0">
                 <a:solidFill>
                   <a:schemeClr val="bg1"/>
                 </a:solidFill>
@@ -11093,7 +11065,7 @@
               </a:rPr>
               <a:t> 시각화</a:t>
             </a:r>
-            <a:endParaRPr lang="en-US" altLang="ko-KR" sz="600" b="1">
+            <a:endParaRPr lang="en-US" altLang="ko-KR" sz="600" b="1" dirty="0">
               <a:solidFill>
                 <a:schemeClr val="bg1"/>
               </a:solidFill>
@@ -11110,7 +11082,7 @@
               <a:defRPr/>
             </a:pPr>
             <a:r>
-              <a:rPr lang="ko-KR" altLang="en-US" sz="600" b="1">
+              <a:rPr lang="ko-KR" altLang="en-US" sz="600" b="1" dirty="0">
                 <a:solidFill>
                   <a:schemeClr val="bg1"/>
                 </a:solidFill>
@@ -11133,25 +11105,16 @@
               <a:defRPr/>
             </a:pPr>
             <a:r>
-              <a:rPr lang="en-US" altLang="ko-KR" sz="1000" b="1">
+              <a:rPr lang="en-US" altLang="ko-KR" sz="1000" b="1" dirty="0">
                 <a:solidFill>
                   <a:schemeClr val="bg1"/>
                 </a:solidFill>
                 <a:latin typeface="+mn-ea"/>
               </a:rPr>
-              <a:t>Machine Learning &amp; Deep Neural Network </a:t>
-            </a:r>
-            <a:r>
-              <a:rPr lang="en-US" altLang="ko-KR" sz="1000" b="1" smtClean="0">
-                <a:solidFill>
-                  <a:schemeClr val="bg1"/>
-                </a:solidFill>
-                <a:latin typeface="+mn-ea"/>
-              </a:rPr>
-              <a:t>Model </a:t>
-            </a:r>
-            <a:r>
-              <a:rPr lang="ko-KR" altLang="en-US" sz="1000" b="1" smtClean="0">
+              <a:t>Machine Learning &amp; Deep Neural Network Model </a:t>
+            </a:r>
+            <a:r>
+              <a:rPr lang="ko-KR" altLang="en-US" sz="1000" b="1" dirty="0">
                 <a:solidFill>
                   <a:schemeClr val="bg1"/>
                 </a:solidFill>
@@ -11176,7 +11139,7 @@
               <a:defRPr/>
             </a:pPr>
             <a:r>
-              <a:rPr lang="en-US" altLang="ko-KR" sz="600" b="1">
+              <a:rPr lang="en-US" altLang="ko-KR" sz="600" b="1" dirty="0">
                 <a:solidFill>
                   <a:schemeClr val="bg1"/>
                 </a:solidFill>
@@ -11195,7 +11158,7 @@
               <a:defRPr/>
             </a:pPr>
             <a:r>
-              <a:rPr lang="en-US" altLang="ko-KR" sz="600" b="1" smtClean="0">
+              <a:rPr lang="en-US" altLang="ko-KR" sz="600" b="1" dirty="0">
                 <a:solidFill>
                   <a:schemeClr val="bg1"/>
                 </a:solidFill>
@@ -11203,12 +11166,6 @@
               </a:rPr>
               <a:t>xxx</a:t>
             </a:r>
-            <a:endParaRPr lang="en-US" altLang="ko-KR" sz="600" b="1">
-              <a:solidFill>
-                <a:schemeClr val="bg1"/>
-              </a:solidFill>
-              <a:latin typeface="+mn-ea"/>
-            </a:endParaRPr>
           </a:p>
           <a:p>
             <a:pPr marL="685800" lvl="1" indent="-228600">
@@ -11220,7 +11177,7 @@
               <a:defRPr/>
             </a:pPr>
             <a:r>
-              <a:rPr lang="en-US" altLang="ko-KR" sz="600" b="1" smtClean="0">
+              <a:rPr lang="en-US" altLang="ko-KR" sz="600" b="1" dirty="0">
                 <a:solidFill>
                   <a:schemeClr val="bg1"/>
                 </a:solidFill>
@@ -11228,12 +11185,6 @@
               </a:rPr>
               <a:t>xxx</a:t>
             </a:r>
-            <a:endParaRPr lang="en-US" altLang="ko-KR" sz="600" b="1">
-              <a:solidFill>
-                <a:schemeClr val="bg1"/>
-              </a:solidFill>
-              <a:latin typeface="+mn-ea"/>
-            </a:endParaRPr>
           </a:p>
           <a:p>
             <a:pPr marL="285750" indent="-228600">
@@ -11243,7 +11194,7 @@
               <a:defRPr/>
             </a:pPr>
             <a:r>
-              <a:rPr lang="ko-KR" altLang="en-US" sz="1000" b="1" smtClean="0">
+              <a:rPr lang="ko-KR" altLang="en-US" sz="1000" b="1" dirty="0">
                 <a:solidFill>
                   <a:schemeClr val="bg1"/>
                 </a:solidFill>
@@ -11251,7 +11202,7 @@
               </a:rPr>
               <a:t>웹 서비스 구현</a:t>
             </a:r>
-            <a:endParaRPr lang="en-US" altLang="ko-KR" sz="1000" b="1" smtClean="0">
+            <a:endParaRPr lang="en-US" altLang="ko-KR" sz="1000" b="1" dirty="0">
               <a:solidFill>
                 <a:schemeClr val="bg1"/>
               </a:solidFill>
@@ -11268,7 +11219,7 @@
               <a:defRPr/>
             </a:pPr>
             <a:r>
-              <a:rPr lang="ko-KR" altLang="en-US" sz="500" b="1" smtClean="0">
+              <a:rPr lang="ko-KR" altLang="en-US" sz="500" b="1" dirty="0">
                 <a:solidFill>
                   <a:schemeClr val="bg1"/>
                 </a:solidFill>
@@ -11277,7 +11228,7 @@
               <a:t>작업분할도 </a:t>
             </a:r>
             <a:r>
-              <a:rPr lang="en-US" altLang="ko-KR" sz="500" b="1" smtClean="0">
+              <a:rPr lang="en-US" altLang="ko-KR" sz="500" b="1" dirty="0">
                 <a:solidFill>
                   <a:schemeClr val="bg1"/>
                 </a:solidFill>
@@ -11286,7 +11237,7 @@
               <a:t>&amp; </a:t>
             </a:r>
             <a:r>
-              <a:rPr lang="ko-KR" altLang="en-US" sz="500" b="1" smtClean="0">
+              <a:rPr lang="ko-KR" altLang="en-US" sz="500" b="1" dirty="0">
                 <a:solidFill>
                   <a:schemeClr val="bg1"/>
                 </a:solidFill>
@@ -11295,7 +11246,7 @@
               <a:t>순차 다이어그램</a:t>
             </a:r>
             <a:r>
-              <a:rPr lang="en-US" altLang="ko-KR" sz="500" b="1" smtClean="0">
+              <a:rPr lang="en-US" altLang="ko-KR" sz="500" b="1" dirty="0">
                 <a:solidFill>
                   <a:schemeClr val="bg1"/>
                 </a:solidFill>
@@ -11314,7 +11265,7 @@
               <a:defRPr/>
             </a:pPr>
             <a:r>
-              <a:rPr lang="ko-KR" altLang="en-US" sz="500" b="1" smtClean="0">
+              <a:rPr lang="ko-KR" altLang="en-US" sz="500" b="1" dirty="0">
                 <a:solidFill>
                   <a:schemeClr val="bg1"/>
                 </a:solidFill>
@@ -11322,7 +11273,7 @@
               </a:rPr>
               <a:t>화면 시연</a:t>
             </a:r>
-            <a:endParaRPr lang="en-US" altLang="ko-KR" sz="500" b="1" smtClean="0">
+            <a:endParaRPr lang="en-US" altLang="ko-KR" sz="500" b="1" dirty="0">
               <a:solidFill>
                 <a:schemeClr val="bg1"/>
               </a:solidFill>
@@ -11337,7 +11288,7 @@
               <a:defRPr/>
             </a:pPr>
             <a:r>
-              <a:rPr lang="ko-KR" altLang="en-US" sz="1000" b="1" smtClean="0">
+              <a:rPr lang="ko-KR" altLang="en-US" sz="1000" b="1" dirty="0">
                 <a:solidFill>
                   <a:schemeClr val="bg1"/>
                 </a:solidFill>
@@ -11362,7 +11313,7 @@
               <a:defRPr/>
             </a:pPr>
             <a:r>
-              <a:rPr lang="ko-KR" altLang="en-US" sz="600" b="1">
+              <a:rPr lang="ko-KR" altLang="en-US" sz="600" b="1" dirty="0">
                 <a:solidFill>
                   <a:schemeClr val="bg1"/>
                 </a:solidFill>
@@ -11371,7 +11322,7 @@
               <a:t>최종 결과(기존 시스템에 기여하는 결과</a:t>
             </a:r>
             <a:r>
-              <a:rPr lang="en-US" altLang="ko-KR" sz="600" b="1">
+              <a:rPr lang="en-US" altLang="ko-KR" sz="600" b="1" dirty="0">
                 <a:solidFill>
                   <a:schemeClr val="bg1"/>
                 </a:solidFill>
@@ -11390,22 +11341,13 @@
               <a:defRPr/>
             </a:pPr>
             <a:r>
-              <a:rPr lang="ko-KR" altLang="en-US" sz="600" b="1">
+              <a:rPr lang="ko-KR" altLang="en-US" sz="600" b="1" dirty="0">
                 <a:solidFill>
                   <a:schemeClr val="bg1"/>
                 </a:solidFill>
                 <a:latin typeface="+mn-ea"/>
               </a:rPr>
-              <a:t>연구의 </a:t>
-            </a:r>
-            <a:r>
-              <a:rPr lang="ko-KR" altLang="en-US" sz="600" b="1" dirty="0">
-                <a:solidFill>
-                  <a:schemeClr val="bg1"/>
-                </a:solidFill>
-                <a:latin typeface="+mn-ea"/>
-              </a:rPr>
-              <a:t>결과 및 시사점</a:t>
+              <a:t>연구의 결과 및 시사점</a:t>
             </a:r>
             <a:endParaRPr lang="en-US" altLang="ko-KR" sz="600" b="1" dirty="0">
               <a:solidFill>
@@ -11430,18 +11372,9 @@
                 </a:solidFill>
                 <a:latin typeface="+mn-ea"/>
               </a:rPr>
-              <a:t>연구 한계 및 향후 </a:t>
-            </a:r>
-            <a:r>
-              <a:rPr lang="ko-KR" altLang="en-US" sz="600" b="1">
-                <a:solidFill>
-                  <a:schemeClr val="bg1"/>
-                </a:solidFill>
-                <a:latin typeface="+mn-ea"/>
-              </a:rPr>
-              <a:t>연구 방향</a:t>
-            </a:r>
-            <a:endParaRPr lang="en-US" altLang="ko-KR" sz="600" b="1">
+              <a:t>연구 한계 및 향후 연구 방향</a:t>
+            </a:r>
+            <a:endParaRPr lang="en-US" altLang="ko-KR" sz="600" b="1" dirty="0">
               <a:solidFill>
                 <a:schemeClr val="bg1"/>
               </a:solidFill>
@@ -11458,7 +11391,7 @@
               <a:defRPr/>
             </a:pPr>
             <a:r>
-              <a:rPr lang="ko-KR" altLang="en-US" sz="600" b="1">
+              <a:rPr lang="ko-KR" altLang="en-US" sz="600" b="1" dirty="0">
                 <a:solidFill>
                   <a:schemeClr val="bg1"/>
                 </a:solidFill>
@@ -14847,7 +14780,7 @@
           <a:lstStyle/>
           <a:p>
             <a:r>
-              <a:rPr lang="en-US" altLang="ko-KR" sz="1400" smtClean="0">
+              <a:rPr lang="en-US" altLang="ko-KR" sz="1400" dirty="0">
                 <a:solidFill>
                   <a:srgbClr val="464646"/>
                 </a:solidFill>
@@ -14856,20 +14789,14 @@
               <a:t>1-4. </a:t>
             </a:r>
             <a:r>
-              <a:rPr lang="ko-KR" altLang="en-US" sz="1400" smtClean="0">
+              <a:rPr lang="ko-KR" altLang="en-US" sz="1400" dirty="0">
                 <a:solidFill>
                   <a:srgbClr val="464646"/>
                 </a:solidFill>
                 <a:latin typeface="+mn-ea"/>
               </a:rPr>
-              <a:t>업무분장</a:t>
-            </a:r>
-            <a:endParaRPr lang="ko-KR" altLang="en-US" sz="1400" dirty="0">
-              <a:solidFill>
-                <a:srgbClr val="464646"/>
-              </a:solidFill>
-              <a:latin typeface="+mn-ea"/>
-            </a:endParaRPr>
+              <a:t>업무분담</a:t>
+            </a:r>
           </a:p>
         </p:txBody>
       </p:sp>
@@ -14883,13 +14810,6 @@
   <p:clrMapOvr>
     <a:masterClrMapping/>
   </p:clrMapOvr>
-  <p:timing>
-    <p:tnLst>
-      <p:par>
-        <p:cTn id="1" dur="indefinite" restart="never" nodeType="tmRoot"/>
-      </p:par>
-    </p:tnLst>
-  </p:timing>
 </p:sld>
 </file>
 
@@ -15927,7 +15847,7 @@
                 <a:defRPr/>
               </a:pPr>
               <a:r>
-                <a:rPr lang="en-US" altLang="ko-KR" sz="1200" smtClean="0">
+                <a:rPr lang="en-US" altLang="ko-KR" sz="1200">
                   <a:solidFill>
                     <a:srgbClr val="3F3F48"/>
                   </a:solidFill>
@@ -15936,25 +15856,16 @@
                 <a:t>OpenAI 1.93.0, </a:t>
               </a:r>
               <a:r>
-                <a:rPr kumimoji="0" lang="en-US" altLang="ko-KR" sz="1200" smtClean="0">
-                  <a:solidFill>
-                    <a:srgbClr val="3F3F48"/>
-                  </a:solidFill>
-                  <a:latin typeface="+mn-ea"/>
-                </a:rPr>
-                <a:t>Tensorflow </a:t>
-              </a:r>
-              <a:r>
                 <a:rPr kumimoji="0" lang="en-US" altLang="ko-KR" sz="1200">
                   <a:solidFill>
                     <a:srgbClr val="3F3F48"/>
                   </a:solidFill>
                   <a:latin typeface="+mn-ea"/>
                 </a:rPr>
-                <a:t>2.10, </a:t>
+                <a:t>Tensorflow 2.10, </a:t>
               </a:r>
               <a:r>
-                <a:rPr lang="en-US" altLang="ko-KR" sz="1200" smtClean="0">
+                <a:rPr lang="en-US" altLang="ko-KR" sz="1200">
                   <a:solidFill>
                     <a:srgbClr val="3F3F48"/>
                   </a:solidFill>
